--- a/presentaciones/Capitulo_V_Anestesicos_Endovenosos.pptx
+++ b/presentaciones/Capitulo_V_Anestesicos_Endovenosos.pptx
@@ -21417,7 +21417,7 @@
                 <a:ea typeface="Cambria" pitchFamily="34" charset="-122"/>
                 <a:cs typeface="Cambria" pitchFamily="34" charset="-120"/>
               </a:rPr>
-              <a:t>Neurocirugía / hipertensión endocraneana</a:t>
+              <a:t>Neurocirugía / HTA endocraneana</a:t>
             </a:r>
             <a:endParaRPr lang="en-US" sz="1400" dirty="0"/>
           </a:p>
@@ -24657,7 +24657,7 @@
                 <a:ea typeface="Calibri" pitchFamily="34" charset="-122"/>
                 <a:cs typeface="Calibri" pitchFamily="34" charset="-120"/>
               </a:rPr>
-              <a:t>Volumen corriente y frecuencia respiratoria suficientes, con normocapnia y saturación de oxígeno satisfactoria en aire ambiente o baja fracción inspirada.</a:t>
+              <a:t>Volumen corriente y frecuencia respiratoria suficientes, con normocapnia y saturación de oxígeno adecuada.</a:t>
             </a:r>
             <a:endParaRPr lang="en-US" sz="1150" dirty="0"/>
           </a:p>
